--- a/dist/초6/국어/토론과글쓰기/초6_국어_토론과글쓰기_03_독자를생각하며고쳐쓰기_학생용.pptx
+++ b/dist/초6/국어/토론과글쓰기/초6_국어_토론과글쓰기_03_독자를생각하며고쳐쓰기_학생용.pptx
@@ -120,13 +120,13 @@
   <p:extLst>
     <p:ext uri="{521415D9-36F7-43E2-AB2F-B90AF26B5E84}">
       <p14:sectionLst xmlns:p14="http://schemas.microsoft.com/office/powerpoint/2010/main">
-        <p14:section name="도입" id="{25621c0a-9681-3669-c38f-f41b4b85b4bf}">
+        <p14:section name="도입" id="{2c001a87-6bb1-c1f8-7428-e8d122b8c1e1}">
           <p14:sldIdLst>
             <p14:sldId id="256"/>
             <p14:sldId id="257"/>
           </p14:sldIdLst>
         </p14:section>
-        <p14:section name="개념" id="{2f16adab-9bfa-2ca0-ec93-b3464fac9a1b}">
+        <p14:section name="개념" id="{85e87207-a373-c7ca-7926-40214a51a850}">
           <p14:sldIdLst>
             <p14:sldId id="258"/>
             <p14:sldId id="259"/>
@@ -135,25 +135,25 @@
             <p14:sldId id="262"/>
           </p14:sldIdLst>
         </p14:section>
-        <p14:section name="연습" id="{e4fd8d63-95ee-c4ab-e5d7-9e91cb85d87a}">
+        <p14:section name="연습" id="{2ef16470-8bd0-90d5-3728-588ba603384d}">
           <p14:sldIdLst>
             <p14:sldId id="263"/>
             <p14:sldId id="264"/>
             <p14:sldId id="265"/>
           </p14:sldIdLst>
         </p14:section>
-        <p14:section name="확인" id="{7b8bd1f3-8a61-bace-e589-593dbeb9515d}">
+        <p14:section name="확인" id="{5d75bebf-4189-17ac-6723-20db4ec53d49}">
           <p14:sldIdLst>
             <p14:sldId id="266"/>
             <p14:sldId id="267"/>
           </p14:sldIdLst>
         </p14:section>
-        <p14:section name="정리" id="{55043fbf-9970-7773-245a-d98d589873d3}">
+        <p14:section name="정리" id="{3c7396e7-575d-ab40-2909-8b98af23f6fb}">
           <p14:sldIdLst>
             <p14:sldId id="268"/>
           </p14:sldIdLst>
         </p14:section>
-        <p14:section name="보충" id="{1541f00e-e548-9c1e-d4f0-f6edc025e0ee}">
+        <p14:section name="보충" id="{47c54290-f659-8a5f-99e9-701e55618dd9}">
           <p14:sldIdLst>
             <p14:sldId id="269"/>
           </p14:sldIdLst>
